--- a/data/09_internal_training/training_6.pptx
+++ b/data/09_internal_training/training_6.pptx
@@ -3140,17 +3140,34 @@
           <a:p/>
           <a:p>
             <a:r>
-              <a:t>东方峻景网络有限公司 是中国 机器人 行业的重要企业之一。</a:t>
-            </a:r>
-          </a:p>
-          <a:p>
-            <a:r>
-              <a:t>根据华辰资本 投资委员会 的研究，该公司成立于 2020 年，</a:t>
-            </a:r>
-          </a:p>
-          <a:p>
-            <a:r>
-              <a:t>目前员工规模约 7859 人。公司近年来持续加大研发投入，</a:t>
+              <a:t>华辰资本旗下的 HC Quant Arbitrage Fund 在最近的资产配置会议中</a:t>
+            </a:r>
+          </a:p>
+          <a:p>
+            <a:r>
+              <a:t>讨论了 新能源 行业的投资机会，并对 戴硕电子网络有限公司</a:t>
+            </a:r>
+          </a:p>
+          <a:p>
+            <a:r>
+              <a:t>进行了重点评估。</a:t>
+            </a:r>
+          </a:p>
+          <a:p/>
+          <a:p/>
+          <a:p>
+            <a:r>
+              <a:t>巨奥传媒有限公司 是中国 人工智能 行业的重要企业之一。</a:t>
+            </a:r>
+          </a:p>
+          <a:p>
+            <a:r>
+              <a:t>根据华辰资本 资产配置委员会 的研究，该公司成立于 2018 年，</a:t>
+            </a:r>
+          </a:p>
+          <a:p>
+            <a:r>
+              <a:t>目前员工规模约 5243 人。公司近年来持续加大研发投入，</a:t>
             </a:r>
           </a:p>
           <a:p>
@@ -3162,34 +3179,22 @@
           <a:p/>
           <a:p>
             <a:r>
-              <a:t>根据内部财务模型测算，精芯信息有限公司 在未来三年</a:t>
-            </a:r>
-          </a:p>
-          <a:p>
-            <a:r>
-              <a:t>收入复合增长率预计可达到 33% 左右。</a:t>
-            </a:r>
-          </a:p>
-          <a:p>
-            <a:r>
-              <a:t>该预测基于行业需求增长以及公司产能扩张计划。</a:t>
-            </a:r>
-          </a:p>
-          <a:p/>
-          <a:p/>
-          <a:p>
-            <a:r>
-              <a:t>华辰资本旗下的 HC Alpha Growth Fund 在最近的资产配置会议中</a:t>
-            </a:r>
-          </a:p>
-          <a:p>
-            <a:r>
-              <a:t>讨论了 消费科技 行业的投资机会，并对 和泰传媒有限公司</a:t>
-            </a:r>
-          </a:p>
-          <a:p>
-            <a:r>
-              <a:t>进行了重点评估。</a:t>
+              <a:t>雨林木风计算机科技有限公司 是中国 半导体 行业的重要企业之一。</a:t>
+            </a:r>
+          </a:p>
+          <a:p>
+            <a:r>
+              <a:t>根据华辰资本 风险管理部 的研究，该公司成立于 2007 年，</a:t>
+            </a:r>
+          </a:p>
+          <a:p>
+            <a:r>
+              <a:t>目前员工规模约 7826 人。公司近年来持续加大研发投入，</a:t>
+            </a:r>
+          </a:p>
+          <a:p>
+            <a:r>
+              <a:t>在核心技术方面形成了较强的竞争壁垒。</a:t>
             </a:r>
           </a:p>
           <a:p/>
@@ -3251,56 +3256,51 @@
           <a:p/>
           <a:p>
             <a:r>
-              <a:t>昊嘉网络有限公司 是中国 新能源 行业的重要企业之一。</a:t>
-            </a:r>
-          </a:p>
-          <a:p>
-            <a:r>
-              <a:t>根据华辰资本 投资策略部 的研究，该公司成立于 2016 年，</a:t>
-            </a:r>
-          </a:p>
-          <a:p>
-            <a:r>
-              <a:t>目前员工规模约 4510 人。公司近年来持续加大研发投入，</a:t>
-            </a:r>
-          </a:p>
-          <a:p>
-            <a:r>
-              <a:t>在核心技术方面形成了较强的竞争壁垒。</a:t>
-            </a:r>
-          </a:p>
-          <a:p/>
-          <a:p/>
-          <a:p>
-            <a:r>
-              <a:t>根据内部财务模型测算，凌云网络有限公司 在未来三年</a:t>
-            </a:r>
-          </a:p>
-          <a:p>
-            <a:r>
-              <a:t>收入复合增长率预计可达到 11% 左右。</a:t>
+              <a:t>从产业链角度看，机器人 行业主要由上游设备厂商、</a:t>
+            </a:r>
+          </a:p>
+          <a:p>
+            <a:r>
+              <a:t>中游平台企业以及下游应用厂商组成。</a:t>
+            </a:r>
+          </a:p>
+          <a:p>
+            <a:r>
+              <a:t>图龙信息传媒有限公司 主要位于产业链的 中游 环节。</a:t>
+            </a:r>
+          </a:p>
+          <a:p/>
+          <a:p/>
+          <a:p>
+            <a:r>
+              <a:t>从产业链角度看，医疗科技 行业主要由上游设备厂商、</a:t>
+            </a:r>
+          </a:p>
+          <a:p>
+            <a:r>
+              <a:t>中游平台企业以及下游应用厂商组成。</a:t>
+            </a:r>
+          </a:p>
+          <a:p>
+            <a:r>
+              <a:t>迪摩信息有限公司 主要位于产业链的 下游 环节。</a:t>
+            </a:r>
+          </a:p>
+          <a:p/>
+          <a:p/>
+          <a:p>
+            <a:r>
+              <a:t>根据内部财务模型测算，迪摩信息有限公司 在未来三年</a:t>
+            </a:r>
+          </a:p>
+          <a:p>
+            <a:r>
+              <a:t>收入复合增长率预计可达到 15% 左右。</a:t>
             </a:r>
           </a:p>
           <a:p>
             <a:r>
               <a:t>该预测基于行业需求增长以及公司产能扩张计划。</a:t>
-            </a:r>
-          </a:p>
-          <a:p/>
-          <a:p/>
-          <a:p>
-            <a:r>
-              <a:t>风险管理部认为，新能源 行业仍然面临若干</a:t>
-            </a:r>
-          </a:p>
-          <a:p>
-            <a:r>
-              <a:t>不确定性因素，包括技术迭代风险、政策变化、</a:t>
-            </a:r>
-          </a:p>
-          <a:p>
-            <a:r>
-              <a:t>以及市场竞争加剧等问题。</a:t>
             </a:r>
           </a:p>
           <a:p/>
@@ -3362,46 +3362,51 @@
           <a:p/>
           <a:p>
             <a:r>
-              <a:t>根据内部财务模型测算，国讯网络有限公司 在未来三年</a:t>
-            </a:r>
-          </a:p>
-          <a:p>
-            <a:r>
-              <a:t>收入复合增长率预计可达到 23% 左右。</a:t>
-            </a:r>
-          </a:p>
-          <a:p>
-            <a:r>
-              <a:t>该预测基于行业需求增长以及公司产能扩张计划。</a:t>
-            </a:r>
-          </a:p>
-          <a:p/>
-          <a:p/>
-          <a:p>
-            <a:r>
-              <a:t>风险管理部认为，云计算 行业仍然面临若干</a:t>
-            </a:r>
-          </a:p>
-          <a:p>
-            <a:r>
-              <a:t>不确定性因素，包括技术迭代风险、政策变化、</a:t>
-            </a:r>
-          </a:p>
-          <a:p>
-            <a:r>
-              <a:t>以及市场竞争加剧等问题。</a:t>
-            </a:r>
-          </a:p>
-          <a:p/>
-          <a:p/>
-          <a:p>
-            <a:r>
-              <a:t>根据内部财务模型测算，天益科技有限公司 在未来三年</a:t>
-            </a:r>
-          </a:p>
-          <a:p>
-            <a:r>
-              <a:t>收入复合增长率预计可达到 15% 左右。</a:t>
+              <a:t>良诺科技有限公司 是中国 云计算 行业的重要企业之一。</a:t>
+            </a:r>
+          </a:p>
+          <a:p>
+            <a:r>
+              <a:t>根据华辰资本 投资委员会 的研究，该公司成立于 2016 年，</a:t>
+            </a:r>
+          </a:p>
+          <a:p>
+            <a:r>
+              <a:t>目前员工规模约 1663 人。公司近年来持续加大研发投入，</a:t>
+            </a:r>
+          </a:p>
+          <a:p>
+            <a:r>
+              <a:t>在核心技术方面形成了较强的竞争壁垒。</a:t>
+            </a:r>
+          </a:p>
+          <a:p/>
+          <a:p/>
+          <a:p>
+            <a:r>
+              <a:t>华辰资本旗下的 HC Alpha Growth Fund 在最近的资产配置会议中</a:t>
+            </a:r>
+          </a:p>
+          <a:p>
+            <a:r>
+              <a:t>讨论了 消费科技 行业的投资机会，并对 鑫博腾飞信息有限公司</a:t>
+            </a:r>
+          </a:p>
+          <a:p>
+            <a:r>
+              <a:t>进行了重点评估。</a:t>
+            </a:r>
+          </a:p>
+          <a:p/>
+          <a:p/>
+          <a:p>
+            <a:r>
+              <a:t>根据内部财务模型测算，富罳网络有限公司 在未来三年</a:t>
+            </a:r>
+          </a:p>
+          <a:p>
+            <a:r>
+              <a:t>收入复合增长率预计可达到 17% 左右。</a:t>
             </a:r>
           </a:p>
           <a:p>
@@ -3468,56 +3473,56 @@
           <a:p/>
           <a:p>
             <a:r>
-              <a:t>风险管理部认为，云计算 行业仍然面临若干</a:t>
-            </a:r>
-          </a:p>
-          <a:p>
-            <a:r>
-              <a:t>不确定性因素，包括技术迭代风险、政策变化、</a:t>
-            </a:r>
-          </a:p>
-          <a:p>
-            <a:r>
-              <a:t>以及市场竞争加剧等问题。</a:t>
-            </a:r>
-          </a:p>
-          <a:p/>
-          <a:p/>
-          <a:p>
-            <a:r>
-              <a:t>银嘉信息有限公司 是中国 消费科技 行业的重要企业之一。</a:t>
-            </a:r>
-          </a:p>
-          <a:p>
-            <a:r>
-              <a:t>根据华辰资本 投资策略部 的研究，该公司成立于 2020 年，</a:t>
-            </a:r>
-          </a:p>
-          <a:p>
-            <a:r>
-              <a:t>目前员工规模约 2026 人。公司近年来持续加大研发投入，</a:t>
+              <a:t>华辰资本旗下的 HC Quant Arbitrage Fund 在最近的资产配置会议中</a:t>
+            </a:r>
+          </a:p>
+          <a:p>
+            <a:r>
+              <a:t>讨论了 人工智能 行业的投资机会，并对 新格林耐特网络有限公司</a:t>
+            </a:r>
+          </a:p>
+          <a:p>
+            <a:r>
+              <a:t>进行了重点评估。</a:t>
+            </a:r>
+          </a:p>
+          <a:p/>
+          <a:p/>
+          <a:p>
+            <a:r>
+              <a:t>从产业链角度看，人工智能 行业主要由上游设备厂商、</a:t>
+            </a:r>
+          </a:p>
+          <a:p>
+            <a:r>
+              <a:t>中游平台企业以及下游应用厂商组成。</a:t>
+            </a:r>
+          </a:p>
+          <a:p>
+            <a:r>
+              <a:t>惠派国际公司科技有限公司 主要位于产业链的 上游 环节。</a:t>
+            </a:r>
+          </a:p>
+          <a:p/>
+          <a:p/>
+          <a:p>
+            <a:r>
+              <a:t>信诚致远科技有限公司 是中国 云计算 行业的重要企业之一。</a:t>
+            </a:r>
+          </a:p>
+          <a:p>
+            <a:r>
+              <a:t>根据华辰资本 投资策略部 的研究，该公司成立于 2014 年，</a:t>
+            </a:r>
+          </a:p>
+          <a:p>
+            <a:r>
+              <a:t>目前员工规模约 1360 人。公司近年来持续加大研发投入，</a:t>
             </a:r>
           </a:p>
           <a:p>
             <a:r>
               <a:t>在核心技术方面形成了较强的竞争壁垒。</a:t>
-            </a:r>
-          </a:p>
-          <a:p/>
-          <a:p/>
-          <a:p>
-            <a:r>
-              <a:t>华辰资本旗下的 HC Quant Arbitrage Fund 在最近的资产配置会议中</a:t>
-            </a:r>
-          </a:p>
-          <a:p>
-            <a:r>
-              <a:t>讨论了 云计算 行业的投资机会，并对 立信电子网络有限公司</a:t>
-            </a:r>
-          </a:p>
-          <a:p>
-            <a:r>
-              <a:t>进行了重点评估。</a:t>
             </a:r>
           </a:p>
           <a:p/>
@@ -3579,24 +3584,24 @@
           <a:p/>
           <a:p>
             <a:r>
-              <a:t>根据内部财务模型测算，艾提科信科技有限公司 在未来三年</a:t>
-            </a:r>
-          </a:p>
-          <a:p>
-            <a:r>
-              <a:t>收入复合增长率预计可达到 34% 左右。</a:t>
-            </a:r>
-          </a:p>
-          <a:p>
-            <a:r>
-              <a:t>该预测基于行业需求增长以及公司产能扩张计划。</a:t>
-            </a:r>
-          </a:p>
-          <a:p/>
-          <a:p/>
-          <a:p>
-            <a:r>
-              <a:t>风险管理部认为，新能源 行业仍然面临若干</a:t>
+              <a:t>华辰资本旗下的 HC Quant Arbitrage Fund 在最近的资产配置会议中</a:t>
+            </a:r>
+          </a:p>
+          <a:p>
+            <a:r>
+              <a:t>讨论了 人工智能 行业的投资机会，并对 惠派国际公司科技有限公司</a:t>
+            </a:r>
+          </a:p>
+          <a:p>
+            <a:r>
+              <a:t>进行了重点评估。</a:t>
+            </a:r>
+          </a:p>
+          <a:p/>
+          <a:p/>
+          <a:p>
+            <a:r>
+              <a:t>风险管理部认为，人工智能 行业仍然面临若干</a:t>
             </a:r>
           </a:p>
           <a:p>
@@ -3613,17 +3618,22 @@
           <a:p/>
           <a:p>
             <a:r>
-              <a:t>从产业链角度看，消费科技 行业主要由上游设备厂商、</a:t>
-            </a:r>
-          </a:p>
-          <a:p>
-            <a:r>
-              <a:t>中游平台企业以及下游应用厂商组成。</a:t>
-            </a:r>
-          </a:p>
-          <a:p>
-            <a:r>
-              <a:t>昂歌信息科技有限公司 主要位于产业链的 下游 环节。</a:t>
+              <a:t>信诚致远网络有限公司 是中国 半导体 行业的重要企业之一。</a:t>
+            </a:r>
+          </a:p>
+          <a:p>
+            <a:r>
+              <a:t>根据华辰资本 投资策略部 的研究，该公司成立于 2015 年，</a:t>
+            </a:r>
+          </a:p>
+          <a:p>
+            <a:r>
+              <a:t>目前员工规模约 2901 人。公司近年来持续加大研发投入，</a:t>
+            </a:r>
+          </a:p>
+          <a:p>
+            <a:r>
+              <a:t>在核心技术方面形成了较强的竞争壁垒。</a:t>
             </a:r>
           </a:p>
           <a:p/>
@@ -3685,7 +3695,7 @@
           <a:p/>
           <a:p>
             <a:r>
-              <a:t>风险管理部认为，云计算 行业仍然面临若干</a:t>
+              <a:t>风险管理部认为，人工智能 行业仍然面临若干</a:t>
             </a:r>
           </a:p>
           <a:p>
@@ -3702,34 +3712,39 @@
           <a:p/>
           <a:p>
             <a:r>
-              <a:t>从产业链角度看，医疗科技 行业主要由上游设备厂商、</a:t>
-            </a:r>
-          </a:p>
-          <a:p>
-            <a:r>
-              <a:t>中游平台企业以及下游应用厂商组成。</a:t>
-            </a:r>
-          </a:p>
-          <a:p>
-            <a:r>
-              <a:t>创亿信息有限公司 主要位于产业链的 中游 环节。</a:t>
-            </a:r>
-          </a:p>
-          <a:p/>
-          <a:p/>
-          <a:p>
-            <a:r>
-              <a:t>华辰资本旗下的 HC Global Macro Fund 在最近的资产配置会议中</a:t>
-            </a:r>
-          </a:p>
-          <a:p>
-            <a:r>
-              <a:t>讨论了 云计算 行业的投资机会，并对 精芯科技有限公司</a:t>
+              <a:t>华辰资本旗下的 HC AI Innovation Fund 在最近的资产配置会议中</a:t>
+            </a:r>
+          </a:p>
+          <a:p>
+            <a:r>
+              <a:t>讨论了 人工智能 行业的投资机会，并对 明腾传媒有限公司</a:t>
             </a:r>
           </a:p>
           <a:p>
             <a:r>
               <a:t>进行了重点评估。</a:t>
+            </a:r>
+          </a:p>
+          <a:p/>
+          <a:p/>
+          <a:p>
+            <a:r>
+              <a:t>昂歌信息信息有限公司 是中国 消费科技 行业的重要企业之一。</a:t>
+            </a:r>
+          </a:p>
+          <a:p>
+            <a:r>
+              <a:t>根据华辰资本 投资委员会 的研究，该公司成立于 2010 年，</a:t>
+            </a:r>
+          </a:p>
+          <a:p>
+            <a:r>
+              <a:t>目前员工规模约 7892 人。公司近年来持续加大研发投入，</a:t>
+            </a:r>
+          </a:p>
+          <a:p>
+            <a:r>
+              <a:t>在核心技术方面形成了较强的竞争壁垒。</a:t>
             </a:r>
           </a:p>
           <a:p/>
@@ -3791,12 +3806,12 @@
           <a:p/>
           <a:p>
             <a:r>
-              <a:t>华辰资本旗下的 HC Alpha Growth Fund 在最近的资产配置会议中</a:t>
-            </a:r>
-          </a:p>
-          <a:p>
-            <a:r>
-              <a:t>讨论了 云计算 行业的投资机会，并对 天益信息有限公司</a:t>
+              <a:t>华辰资本旗下的 HC Quant Arbitrage Fund 在最近的资产配置会议中</a:t>
+            </a:r>
+          </a:p>
+          <a:p>
+            <a:r>
+              <a:t>讨论了 消费科技 行业的投资机会，并对 联软科技有限公司</a:t>
             </a:r>
           </a:p>
           <a:p>
@@ -3808,7 +3823,7 @@
           <a:p/>
           <a:p>
             <a:r>
-              <a:t>从产业链角度看，机器人 行业主要由上游设备厂商、</a:t>
+              <a:t>从产业链角度看，新能源 行业主要由上游设备厂商、</a:t>
             </a:r>
           </a:p>
           <a:p>
@@ -3818,24 +3833,24 @@
           </a:p>
           <a:p>
             <a:r>
-              <a:t>新宇龙信息传媒有限公司 主要位于产业链的 中游 环节。</a:t>
-            </a:r>
-          </a:p>
-          <a:p/>
-          <a:p/>
-          <a:p>
-            <a:r>
-              <a:t>华辰资本旗下的 HC AI Innovation Fund 在最近的资产配置会议中</a:t>
-            </a:r>
-          </a:p>
-          <a:p>
-            <a:r>
-              <a:t>讨论了 半导体 行业的投资机会，并对 鸿睿思博信息有限公司</a:t>
-            </a:r>
-          </a:p>
-          <a:p>
-            <a:r>
-              <a:t>进行了重点评估。</a:t>
+              <a:t>富罳网络有限公司 主要位于产业链的 中游 环节。</a:t>
+            </a:r>
+          </a:p>
+          <a:p/>
+          <a:p/>
+          <a:p>
+            <a:r>
+              <a:t>从产业链角度看，半导体 行业主要由上游设备厂商、</a:t>
+            </a:r>
+          </a:p>
+          <a:p>
+            <a:r>
+              <a:t>中游平台企业以及下游应用厂商组成。</a:t>
+            </a:r>
+          </a:p>
+          <a:p>
+            <a:r>
+              <a:t>华泰通安网络有限公司 主要位于产业链的 下游 环节。</a:t>
             </a:r>
           </a:p>
           <a:p/>
@@ -3897,7 +3912,51 @@
           <a:p/>
           <a:p>
             <a:r>
-              <a:t>风险管理部认为，人工智能 行业仍然面临若干</a:t>
+              <a:t>鑫博腾飞信息有限公司 是中国 消费科技 行业的重要企业之一。</a:t>
+            </a:r>
+          </a:p>
+          <a:p>
+            <a:r>
+              <a:t>根据华辰资本 量化研究部 的研究，该公司成立于 2016 年，</a:t>
+            </a:r>
+          </a:p>
+          <a:p>
+            <a:r>
+              <a:t>目前员工规模约 4167 人。公司近年来持续加大研发投入，</a:t>
+            </a:r>
+          </a:p>
+          <a:p>
+            <a:r>
+              <a:t>在核心技术方面形成了较强的竞争壁垒。</a:t>
+            </a:r>
+          </a:p>
+          <a:p/>
+          <a:p/>
+          <a:p>
+            <a:r>
+              <a:t>方正科技信息有限公司 是中国 消费科技 行业的重要企业之一。</a:t>
+            </a:r>
+          </a:p>
+          <a:p>
+            <a:r>
+              <a:t>根据华辰资本 投资委员会 的研究，该公司成立于 2006 年，</a:t>
+            </a:r>
+          </a:p>
+          <a:p>
+            <a:r>
+              <a:t>目前员工规模约 4942 人。公司近年来持续加大研发投入，</a:t>
+            </a:r>
+          </a:p>
+          <a:p>
+            <a:r>
+              <a:t>在核心技术方面形成了较强的竞争壁垒。</a:t>
+            </a:r>
+          </a:p>
+          <a:p/>
+          <a:p/>
+          <a:p>
+            <a:r>
+              <a:t>风险管理部认为，半导体 行业仍然面临若干</a:t>
             </a:r>
           </a:p>
           <a:p>
@@ -3908,40 +3967,6 @@
           <a:p>
             <a:r>
               <a:t>以及市场竞争加剧等问题。</a:t>
-            </a:r>
-          </a:p>
-          <a:p/>
-          <a:p/>
-          <a:p>
-            <a:r>
-              <a:t>从产业链角度看，人工智能 行业主要由上游设备厂商、</a:t>
-            </a:r>
-          </a:p>
-          <a:p>
-            <a:r>
-              <a:t>中游平台企业以及下游应用厂商组成。</a:t>
-            </a:r>
-          </a:p>
-          <a:p>
-            <a:r>
-              <a:t>迪摩科技有限公司 主要位于产业链的 上游 环节。</a:t>
-            </a:r>
-          </a:p>
-          <a:p/>
-          <a:p/>
-          <a:p>
-            <a:r>
-              <a:t>从产业链角度看，机器人 行业主要由上游设备厂商、</a:t>
-            </a:r>
-          </a:p>
-          <a:p>
-            <a:r>
-              <a:t>中游平台企业以及下游应用厂商组成。</a:t>
-            </a:r>
-          </a:p>
-          <a:p>
-            <a:r>
-              <a:t>艾提科信科技有限公司 主要位于产业链的 中游 环节。</a:t>
             </a:r>
           </a:p>
           <a:p/>
@@ -4003,7 +4028,7 @@
           <a:p/>
           <a:p>
             <a:r>
-              <a:t>风险管理部认为，云计算 行业仍然面临若干</a:t>
+              <a:t>风险管理部认为，人工智能 行业仍然面临若干</a:t>
             </a:r>
           </a:p>
           <a:p>
@@ -4020,34 +4045,39 @@
           <a:p/>
           <a:p>
             <a:r>
-              <a:t>根据内部财务模型测算，银嘉信息有限公司 在未来三年</a:t>
-            </a:r>
-          </a:p>
-          <a:p>
-            <a:r>
-              <a:t>收入复合增长率预计可达到 14% 左右。</a:t>
-            </a:r>
-          </a:p>
-          <a:p>
-            <a:r>
-              <a:t>该预测基于行业需求增长以及公司产能扩张计划。</a:t>
-            </a:r>
-          </a:p>
-          <a:p/>
-          <a:p/>
-          <a:p>
-            <a:r>
-              <a:t>根据内部财务模型测算，立信电子网络有限公司 在未来三年</a:t>
-            </a:r>
-          </a:p>
-          <a:p>
-            <a:r>
-              <a:t>收入复合增长率预计可达到 18% 左右。</a:t>
-            </a:r>
-          </a:p>
-          <a:p>
-            <a:r>
-              <a:t>该预测基于行业需求增长以及公司产能扩张计划。</a:t>
+              <a:t>联软科技有限公司 是中国 消费科技 行业的重要企业之一。</a:t>
+            </a:r>
+          </a:p>
+          <a:p>
+            <a:r>
+              <a:t>根据华辰资本 资产配置委员会 的研究，该公司成立于 2009 年，</a:t>
+            </a:r>
+          </a:p>
+          <a:p>
+            <a:r>
+              <a:t>目前员工规模约 7080 人。公司近年来持续加大研发投入，</a:t>
+            </a:r>
+          </a:p>
+          <a:p>
+            <a:r>
+              <a:t>在核心技术方面形成了较强的竞争壁垒。</a:t>
+            </a:r>
+          </a:p>
+          <a:p/>
+          <a:p/>
+          <a:p>
+            <a:r>
+              <a:t>从产业链角度看，人工智能 行业主要由上游设备厂商、</a:t>
+            </a:r>
+          </a:p>
+          <a:p>
+            <a:r>
+              <a:t>中游平台企业以及下游应用厂商组成。</a:t>
+            </a:r>
+          </a:p>
+          <a:p>
+            <a:r>
+              <a:t>方正科技传媒有限公司 主要位于产业链的 中游 环节。</a:t>
             </a:r>
           </a:p>
           <a:p/>
@@ -4109,17 +4139,17 @@
           <a:p/>
           <a:p>
             <a:r>
-              <a:t>华辰资本旗下的 HC Alpha Growth Fund 在最近的资产配置会议中</a:t>
-            </a:r>
-          </a:p>
-          <a:p>
-            <a:r>
-              <a:t>讨论了 医疗科技 行业的投资机会，并对 雨林木风计算机网络有限公司</a:t>
-            </a:r>
-          </a:p>
-          <a:p>
-            <a:r>
-              <a:t>进行了重点评估。</a:t>
+              <a:t>风险管理部认为，人工智能 行业仍然面临若干</a:t>
+            </a:r>
+          </a:p>
+          <a:p>
+            <a:r>
+              <a:t>不确定性因素，包括技术迭代风险、政策变化、</a:t>
+            </a:r>
+          </a:p>
+          <a:p>
+            <a:r>
+              <a:t>以及市场竞争加剧等问题。</a:t>
             </a:r>
           </a:p>
           <a:p/>
@@ -4143,17 +4173,22 @@
           <a:p/>
           <a:p>
             <a:r>
-              <a:t>根据内部财务模型测算，新宇龙信息传媒有限公司 在未来三年</a:t>
-            </a:r>
-          </a:p>
-          <a:p>
-            <a:r>
-              <a:t>收入复合增长率预计可达到 22% 左右。</a:t>
-            </a:r>
-          </a:p>
-          <a:p>
-            <a:r>
-              <a:t>该预测基于行业需求增长以及公司产能扩张计划。</a:t>
+              <a:t>惠派国际公司科技有限公司 是中国 人工智能 行业的重要企业之一。</a:t>
+            </a:r>
+          </a:p>
+          <a:p>
+            <a:r>
+              <a:t>根据华辰资本 风险管理部 的研究，该公司成立于 2019 年，</a:t>
+            </a:r>
+          </a:p>
+          <a:p>
+            <a:r>
+              <a:t>目前员工规模约 6944 人。公司近年来持续加大研发投入，</a:t>
+            </a:r>
+          </a:p>
+          <a:p>
+            <a:r>
+              <a:t>在核心技术方面形成了较强的竞争壁垒。</a:t>
             </a:r>
           </a:p>
           <a:p/>
@@ -4215,61 +4250,51 @@
           <a:p/>
           <a:p>
             <a:r>
-              <a:t>华远软件信息有限公司 是中国 半导体 行业的重要企业之一。</a:t>
-            </a:r>
-          </a:p>
-          <a:p>
-            <a:r>
-              <a:t>根据华辰资本 量化研究部 的研究，该公司成立于 2015 年，</a:t>
-            </a:r>
-          </a:p>
-          <a:p>
-            <a:r>
-              <a:t>目前员工规模约 6302 人。公司近年来持续加大研发投入，</a:t>
-            </a:r>
-          </a:p>
-          <a:p>
-            <a:r>
-              <a:t>在核心技术方面形成了较强的竞争壁垒。</a:t>
-            </a:r>
-          </a:p>
-          <a:p/>
-          <a:p/>
-          <a:p>
-            <a:r>
-              <a:t>华辰资本旗下的 HC AI Innovation Fund 在最近的资产配置会议中</a:t>
-            </a:r>
-          </a:p>
-          <a:p>
-            <a:r>
-              <a:t>讨论了 人工智能 行业的投资机会，并对 信诚致远传媒有限公司</a:t>
+              <a:t>风险管理部认为，新能源 行业仍然面临若干</a:t>
+            </a:r>
+          </a:p>
+          <a:p>
+            <a:r>
+              <a:t>不确定性因素，包括技术迭代风险、政策变化、</a:t>
+            </a:r>
+          </a:p>
+          <a:p>
+            <a:r>
+              <a:t>以及市场竞争加剧等问题。</a:t>
+            </a:r>
+          </a:p>
+          <a:p/>
+          <a:p/>
+          <a:p>
+            <a:r>
+              <a:t>风险管理部认为，云计算 行业仍然面临若干</a:t>
+            </a:r>
+          </a:p>
+          <a:p>
+            <a:r>
+              <a:t>不确定性因素，包括技术迭代风险、政策变化、</a:t>
+            </a:r>
+          </a:p>
+          <a:p>
+            <a:r>
+              <a:t>以及市场竞争加剧等问题。</a:t>
+            </a:r>
+          </a:p>
+          <a:p/>
+          <a:p/>
+          <a:p>
+            <a:r>
+              <a:t>华辰资本旗下的 HC Energy Transition Fund 在最近的资产配置会议中</a:t>
+            </a:r>
+          </a:p>
+          <a:p>
+            <a:r>
+              <a:t>讨论了 半导体 行业的投资机会，并对 华泰通安网络有限公司</a:t>
             </a:r>
           </a:p>
           <a:p>
             <a:r>
               <a:t>进行了重点评估。</a:t>
-            </a:r>
-          </a:p>
-          <a:p/>
-          <a:p/>
-          <a:p>
-            <a:r>
-              <a:t>易动力科技有限公司 是中国 云计算 行业的重要企业之一。</a:t>
-            </a:r>
-          </a:p>
-          <a:p>
-            <a:r>
-              <a:t>根据华辰资本 资产配置委员会 的研究，该公司成立于 2014 年，</a:t>
-            </a:r>
-          </a:p>
-          <a:p>
-            <a:r>
-              <a:t>目前员工规模约 1450 人。公司近年来持续加大研发投入，</a:t>
-            </a:r>
-          </a:p>
-          <a:p>
-            <a:r>
-              <a:t>在核心技术方面形成了较强的竞争壁垒。</a:t>
             </a:r>
           </a:p>
           <a:p/>
@@ -4331,51 +4356,56 @@
           <a:p/>
           <a:p>
             <a:r>
-              <a:t>根据内部财务模型测算，华远软件信息有限公司 在未来三年</a:t>
-            </a:r>
-          </a:p>
-          <a:p>
-            <a:r>
-              <a:t>收入复合增长率预计可达到 30% 左右。</a:t>
-            </a:r>
-          </a:p>
-          <a:p>
-            <a:r>
-              <a:t>该预测基于行业需求增长以及公司产能扩张计划。</a:t>
-            </a:r>
-          </a:p>
-          <a:p/>
-          <a:p/>
-          <a:p>
-            <a:r>
-              <a:t>根据内部财务模型测算，易动力科技有限公司 在未来三年</a:t>
-            </a:r>
-          </a:p>
-          <a:p>
-            <a:r>
-              <a:t>收入复合增长率预计可达到 11% 左右。</a:t>
-            </a:r>
-          </a:p>
-          <a:p>
-            <a:r>
-              <a:t>该预测基于行业需求增长以及公司产能扩张计划。</a:t>
-            </a:r>
-          </a:p>
-          <a:p/>
-          <a:p/>
-          <a:p>
-            <a:r>
-              <a:t>华辰资本旗下的 HC Energy Transition Fund 在最近的资产配置会议中</a:t>
-            </a:r>
-          </a:p>
-          <a:p>
-            <a:r>
-              <a:t>讨论了 消费科技 行业的投资机会，并对 昂歌信息科技有限公司</a:t>
-            </a:r>
-          </a:p>
-          <a:p>
-            <a:r>
-              <a:t>进行了重点评估。</a:t>
+              <a:t>风险管理部认为，人工智能 行业仍然面临若干</a:t>
+            </a:r>
+          </a:p>
+          <a:p>
+            <a:r>
+              <a:t>不确定性因素，包括技术迭代风险、政策变化、</a:t>
+            </a:r>
+          </a:p>
+          <a:p>
+            <a:r>
+              <a:t>以及市场竞争加剧等问题。</a:t>
+            </a:r>
+          </a:p>
+          <a:p/>
+          <a:p/>
+          <a:p>
+            <a:r>
+              <a:t>风险管理部认为，云计算 行业仍然面临若干</a:t>
+            </a:r>
+          </a:p>
+          <a:p>
+            <a:r>
+              <a:t>不确定性因素，包括技术迭代风险、政策变化、</a:t>
+            </a:r>
+          </a:p>
+          <a:p>
+            <a:r>
+              <a:t>以及市场竞争加剧等问题。</a:t>
+            </a:r>
+          </a:p>
+          <a:p/>
+          <a:p/>
+          <a:p>
+            <a:r>
+              <a:t>昊嘉科技有限公司 是中国 医疗科技 行业的重要企业之一。</a:t>
+            </a:r>
+          </a:p>
+          <a:p>
+            <a:r>
+              <a:t>根据华辰资本 量化研究部 的研究，该公司成立于 2006 年，</a:t>
+            </a:r>
+          </a:p>
+          <a:p>
+            <a:r>
+              <a:t>目前员工规模约 7977 人。公司近年来持续加大研发投入，</a:t>
+            </a:r>
+          </a:p>
+          <a:p>
+            <a:r>
+              <a:t>在核心技术方面形成了较强的竞争壁垒。</a:t>
             </a:r>
           </a:p>
           <a:p/>
@@ -4437,41 +4467,29 @@
           <a:p/>
           <a:p>
             <a:r>
-              <a:t>从产业链角度看，新能源 行业主要由上游设备厂商、</a:t>
-            </a:r>
-          </a:p>
-          <a:p>
-            <a:r>
-              <a:t>中游平台企业以及下游应用厂商组成。</a:t>
-            </a:r>
-          </a:p>
-          <a:p>
-            <a:r>
-              <a:t>飞利信科技有限公司 主要位于产业链的 中游 环节。</a:t>
-            </a:r>
-          </a:p>
-          <a:p/>
-          <a:p/>
-          <a:p>
-            <a:r>
-              <a:t>从产业链角度看，半导体 行业主要由上游设备厂商、</a:t>
-            </a:r>
-          </a:p>
-          <a:p>
-            <a:r>
-              <a:t>中游平台企业以及下游应用厂商组成。</a:t>
-            </a:r>
-          </a:p>
-          <a:p>
-            <a:r>
-              <a:t>天益科技有限公司 主要位于产业链的 上游 环节。</a:t>
-            </a:r>
-          </a:p>
-          <a:p/>
-          <a:p/>
-          <a:p>
-            <a:r>
-              <a:t>风险管理部认为，新能源 行业仍然面临若干</a:t>
+              <a:t>创汇传媒有限公司 是中国 新能源 行业的重要企业之一。</a:t>
+            </a:r>
+          </a:p>
+          <a:p>
+            <a:r>
+              <a:t>根据华辰资本 投资委员会 的研究，该公司成立于 2017 年，</a:t>
+            </a:r>
+          </a:p>
+          <a:p>
+            <a:r>
+              <a:t>目前员工规模约 7084 人。公司近年来持续加大研发投入，</a:t>
+            </a:r>
+          </a:p>
+          <a:p>
+            <a:r>
+              <a:t>在核心技术方面形成了较强的竞争壁垒。</a:t>
+            </a:r>
+          </a:p>
+          <a:p/>
+          <a:p/>
+          <a:p>
+            <a:r>
+              <a:t>风险管理部认为，医疗科技 行业仍然面临若干</a:t>
             </a:r>
           </a:p>
           <a:p>
@@ -4482,6 +4500,23 @@
           <a:p>
             <a:r>
               <a:t>以及市场竞争加剧等问题。</a:t>
+            </a:r>
+          </a:p>
+          <a:p/>
+          <a:p/>
+          <a:p>
+            <a:r>
+              <a:t>根据内部财务模型测算，中建创业科技有限公司 在未来三年</a:t>
+            </a:r>
+          </a:p>
+          <a:p>
+            <a:r>
+              <a:t>收入复合增长率预计可达到 27% 左右。</a:t>
+            </a:r>
+          </a:p>
+          <a:p>
+            <a:r>
+              <a:t>该预测基于行业需求增长以及公司产能扩张计划。</a:t>
             </a:r>
           </a:p>
           <a:p/>
@@ -4543,56 +4578,56 @@
           <a:p/>
           <a:p>
             <a:r>
+              <a:t>从产业链角度看，机器人 行业主要由上游设备厂商、</a:t>
+            </a:r>
+          </a:p>
+          <a:p>
+            <a:r>
+              <a:t>中游平台企业以及下游应用厂商组成。</a:t>
+            </a:r>
+          </a:p>
+          <a:p>
+            <a:r>
+              <a:t>图龙信息传媒有限公司 主要位于产业链的 上游 环节。</a:t>
+            </a:r>
+          </a:p>
+          <a:p/>
+          <a:p/>
+          <a:p>
+            <a:r>
+              <a:t>昂歌信息信息有限公司 是中国 消费科技 行业的重要企业之一。</a:t>
+            </a:r>
+          </a:p>
+          <a:p>
+            <a:r>
+              <a:t>根据华辰资本 量化研究部 的研究，该公司成立于 2010 年，</a:t>
+            </a:r>
+          </a:p>
+          <a:p>
+            <a:r>
+              <a:t>目前员工规模约 7892 人。公司近年来持续加大研发投入，</a:t>
+            </a:r>
+          </a:p>
+          <a:p>
+            <a:r>
+              <a:t>在核心技术方面形成了较强的竞争壁垒。</a:t>
+            </a:r>
+          </a:p>
+          <a:p/>
+          <a:p/>
+          <a:p>
+            <a:r>
               <a:t>华辰资本旗下的 HC Alpha Growth Fund 在最近的资产配置会议中</a:t>
             </a:r>
           </a:p>
           <a:p>
             <a:r>
-              <a:t>讨论了 云计算 行业的投资机会，并对 立信电子网络有限公司</a:t>
+              <a:t>讨论了 半导体 行业的投资机会，并对 雨林木风计算机科技有限公司</a:t>
             </a:r>
           </a:p>
           <a:p>
             <a:r>
               <a:t>进行了重点评估。</a:t>
-            </a:r>
-          </a:p>
-          <a:p/>
-          <a:p/>
-          <a:p>
-            <a:r>
-              <a:t>雨林木风计算机科技有限公司 是中国 人工智能 行业的重要企业之一。</a:t>
-            </a:r>
-          </a:p>
-          <a:p>
-            <a:r>
-              <a:t>根据华辰资本 资产配置委员会 的研究，该公司成立于 2019 年，</a:t>
-            </a:r>
-          </a:p>
-          <a:p>
-            <a:r>
-              <a:t>目前员工规模约 1578 人。公司近年来持续加大研发投入，</a:t>
-            </a:r>
-          </a:p>
-          <a:p>
-            <a:r>
-              <a:t>在核心技术方面形成了较强的竞争壁垒。</a:t>
-            </a:r>
-          </a:p>
-          <a:p/>
-          <a:p/>
-          <a:p>
-            <a:r>
-              <a:t>风险管理部认为，人工智能 行业仍然面临若干</a:t>
-            </a:r>
-          </a:p>
-          <a:p>
-            <a:r>
-              <a:t>不确定性因素，包括技术迭代风险、政策变化、</a:t>
-            </a:r>
-          </a:p>
-          <a:p>
-            <a:r>
-              <a:t>以及市场竞争加剧等问题。</a:t>
             </a:r>
           </a:p>
           <a:p/>
@@ -4654,7 +4689,7 @@
           <a:p/>
           <a:p>
             <a:r>
-              <a:t>从产业链角度看，机器人 行业主要由上游设备厂商、</a:t>
+              <a:t>从产业链角度看，云计算 行业主要由上游设备厂商、</a:t>
             </a:r>
           </a:p>
           <a:p>
@@ -4664,46 +4699,41 @@
           </a:p>
           <a:p>
             <a:r>
-              <a:t>济南亿次元网络有限公司 主要位于产业链的 下游 环节。</a:t>
-            </a:r>
-          </a:p>
-          <a:p/>
-          <a:p/>
-          <a:p>
-            <a:r>
-              <a:t>东方峻景传媒有限公司 是中国 新能源 行业的重要企业之一。</a:t>
-            </a:r>
-          </a:p>
-          <a:p>
-            <a:r>
-              <a:t>根据华辰资本 量化研究部 的研究，该公司成立于 2013 年，</a:t>
-            </a:r>
-          </a:p>
-          <a:p>
-            <a:r>
-              <a:t>目前员工规模约 6208 人。公司近年来持续加大研发投入，</a:t>
-            </a:r>
-          </a:p>
-          <a:p>
-            <a:r>
-              <a:t>在核心技术方面形成了较强的竞争壁垒。</a:t>
-            </a:r>
-          </a:p>
-          <a:p/>
-          <a:p/>
-          <a:p>
-            <a:r>
-              <a:t>风险管理部认为，人工智能 行业仍然面临若干</a:t>
-            </a:r>
-          </a:p>
-          <a:p>
-            <a:r>
-              <a:t>不确定性因素，包括技术迭代风险、政策变化、</a:t>
-            </a:r>
-          </a:p>
-          <a:p>
-            <a:r>
-              <a:t>以及市场竞争加剧等问题。</a:t>
+              <a:t>艾提科信科技有限公司 主要位于产业链的 下游 环节。</a:t>
+            </a:r>
+          </a:p>
+          <a:p/>
+          <a:p/>
+          <a:p>
+            <a:r>
+              <a:t>根据内部财务模型测算，飞海科技传媒有限公司 在未来三年</a:t>
+            </a:r>
+          </a:p>
+          <a:p>
+            <a:r>
+              <a:t>收入复合增长率预计可达到 12% 左右。</a:t>
+            </a:r>
+          </a:p>
+          <a:p>
+            <a:r>
+              <a:t>该预测基于行业需求增长以及公司产能扩张计划。</a:t>
+            </a:r>
+          </a:p>
+          <a:p/>
+          <a:p/>
+          <a:p>
+            <a:r>
+              <a:t>根据内部财务模型测算，图龙信息传媒有限公司 在未来三年</a:t>
+            </a:r>
+          </a:p>
+          <a:p>
+            <a:r>
+              <a:t>收入复合增长率预计可达到 15% 左右。</a:t>
+            </a:r>
+          </a:p>
+          <a:p>
+            <a:r>
+              <a:t>该预测基于行业需求增长以及公司产能扩张计划。</a:t>
             </a:r>
           </a:p>
           <a:p/>
